--- a/business-plan/HealthMatch_Pitch_Deck.pptx
+++ b/business-plan/HealthMatch_Pitch_Deck.pptx
@@ -6375,7 +6375,7 @@
                 <a:ea typeface="Arial" pitchFamily="34" charset="-122"/>
                 <a:cs typeface="Arial" pitchFamily="34" charset="-120"/>
               </a:rPr>
-              <a:t>já validado em produção, base de código auditada</a:t>
+              <a:t>construído e testado, pronto para implantar</a:t>
             </a:r>
             <a:endParaRPr lang="en-US" sz="1150" dirty="0"/>
           </a:p>
@@ -9048,7 +9048,7 @@
                 <a:ea typeface="Arial" pitchFamily="34" charset="-122"/>
                 <a:cs typeface="Arial" pitchFamily="34" charset="-120"/>
               </a:rPr>
-              <a:t>Não é protótipo: o produto já operou em produção</a:t>
+              <a:t>Não é uma ideia: o produto já está construído e testado</a:t>
             </a:r>
             <a:endParaRPr lang="en-US" sz="3000" dirty="0"/>
           </a:p>
@@ -9394,7 +9394,7 @@
                 <a:ea typeface="Arial" pitchFamily="34" charset="-122"/>
                 <a:cs typeface="Arial" pitchFamily="34" charset="-120"/>
               </a:rPr>
-              <a:t>1:1</a:t>
+              <a:t>Pronto</a:t>
             </a:r>
             <a:endParaRPr lang="en-US" sz="2600" dirty="0"/>
           </a:p>
@@ -9433,7 +9433,7 @@
                 <a:ea typeface="Arial" pitchFamily="34" charset="-122"/>
                 <a:cs typeface="Arial" pitchFamily="34" charset="-120"/>
               </a:rPr>
-              <a:t>paridade com a produção anterior</a:t>
+              <a:t>para o primeiro piloto</a:t>
             </a:r>
             <a:endParaRPr lang="en-US" sz="1300" dirty="0"/>
           </a:p>
